--- a/DCG CV Repo/Daniel Gutiérrez/Daniel Gutiérrez CV.pptx
+++ b/DCG CV Repo/Daniel Gutiérrez/Daniel Gutiérrez CV.pptx
@@ -18108,7 +18108,7 @@
           <a:p>
             <a:pPr algn="just" fontAlgn="base"/>
             <a:r>
-              <a:rPr lang="en-US" sz="1000" b="1" dirty="0">
+              <a:rPr lang="en-US" sz="900" b="1" dirty="0">
                 <a:solidFill>
                   <a:srgbClr val="6FC2B4"/>
                 </a:solidFill>
@@ -18118,98 +18118,10 @@
               </a:rPr>
               <a:t>Deloitte | Consultor Senior | Banca | 2023 – Actualidad</a:t>
             </a:r>
-            <a:r>
-              <a:rPr lang="en-US" sz="1000" b="1" dirty="0" err="1">
-                <a:solidFill>
-                  <a:srgbClr val="6FC2B4"/>
-                </a:solidFill>
-                <a:latin typeface="Open Sans" panose="020B0606030504020204" pitchFamily="34" charset="0"/>
-                <a:ea typeface="Open Sans" panose="020B0606030504020204" pitchFamily="34" charset="0"/>
-                <a:cs typeface="Open Sans" panose="020B0606030504020204" pitchFamily="34" charset="0"/>
-              </a:rPr>
-              <a:t/>
-            </a:r>
-            <a:r>
-              <a:rPr lang="en-US" sz="1000" b="1" dirty="0">
-                <a:solidFill>
-                  <a:srgbClr val="6FC2B4"/>
-                </a:solidFill>
-                <a:latin typeface="Open Sans" panose="020B0606030504020204" pitchFamily="34" charset="0"/>
-                <a:ea typeface="Open Sans" panose="020B0606030504020204" pitchFamily="34" charset="0"/>
-                <a:cs typeface="Open Sans" panose="020B0606030504020204" pitchFamily="34" charset="0"/>
-              </a:rPr>
-              <a:t/>
-            </a:r>
-            <a:r>
-              <a:rPr lang="en-US" sz="1000" b="1" dirty="0" err="1">
-                <a:solidFill>
-                  <a:srgbClr val="6FC2B4"/>
-                </a:solidFill>
-                <a:latin typeface="Open Sans" panose="020B0606030504020204" pitchFamily="34" charset="0"/>
-                <a:ea typeface="Open Sans" panose="020B0606030504020204" pitchFamily="34" charset="0"/>
-                <a:cs typeface="Open Sans" panose="020B0606030504020204" pitchFamily="34" charset="0"/>
-              </a:rPr>
-              <a:t/>
-            </a:r>
-            <a:r>
-              <a:rPr lang="en-US" sz="1000" b="1" dirty="0">
-                <a:solidFill>
-                  <a:srgbClr val="6FC2B4"/>
-                </a:solidFill>
-                <a:latin typeface="Open Sans" panose="020B0606030504020204" pitchFamily="34" charset="0"/>
-                <a:ea typeface="Open Sans" panose="020B0606030504020204" pitchFamily="34" charset="0"/>
-                <a:cs typeface="Open Sans" panose="020B0606030504020204" pitchFamily="34" charset="0"/>
-              </a:rPr>
-              <a:t/>
-            </a:r>
-            <a:r>
-              <a:rPr lang="en-US" sz="1000" b="1" dirty="0" err="1">
-                <a:solidFill>
-                  <a:srgbClr val="6FC2B4"/>
-                </a:solidFill>
-                <a:latin typeface="Open Sans" panose="020B0606030504020204" pitchFamily="34" charset="0"/>
-                <a:ea typeface="Open Sans" panose="020B0606030504020204" pitchFamily="34" charset="0"/>
-                <a:cs typeface="Open Sans" panose="020B0606030504020204" pitchFamily="34" charset="0"/>
-              </a:rPr>
-              <a:t/>
-            </a:r>
-            <a:r>
-              <a:rPr lang="en-US" sz="1000" b="1" dirty="0">
-                <a:solidFill>
-                  <a:srgbClr val="6FC2B4"/>
-                </a:solidFill>
-                <a:latin typeface="Open Sans" panose="020B0606030504020204" pitchFamily="34" charset="0"/>
-                <a:ea typeface="Open Sans" panose="020B0606030504020204" pitchFamily="34" charset="0"/>
-                <a:cs typeface="Open Sans" panose="020B0606030504020204" pitchFamily="34" charset="0"/>
-              </a:rPr>
-              <a:t/>
-            </a:r>
-            <a:r>
-              <a:rPr lang="en-US" sz="1000" b="1" dirty="0" err="1">
-                <a:solidFill>
-                  <a:srgbClr val="6FC2B4"/>
-                </a:solidFill>
-                <a:latin typeface="Open Sans" panose="020B0606030504020204" pitchFamily="34" charset="0"/>
-                <a:ea typeface="Open Sans" panose="020B0606030504020204" pitchFamily="34" charset="0"/>
-                <a:cs typeface="Open Sans" panose="020B0606030504020204" pitchFamily="34" charset="0"/>
-              </a:rPr>
-              <a:t/>
-            </a:r>
-            <a:r>
-              <a:rPr lang="en-US" sz="1000" b="1" dirty="0">
-                <a:solidFill>
-                  <a:srgbClr val="6FC2B4"/>
-                </a:solidFill>
-                <a:latin typeface="Open Sans" panose="020B0606030504020204" pitchFamily="34" charset="0"/>
-                <a:ea typeface="Open Sans" panose="020B0606030504020204" pitchFamily="34" charset="0"/>
-                <a:cs typeface="Open Sans" panose="020B0606030504020204" pitchFamily="34" charset="0"/>
-              </a:rPr>
-              <a:t/>
-            </a:r>
           </a:p>
           <a:p>
             <a:pPr algn="just" fontAlgn="base"/>
-            <a:endParaRPr lang="en-US" sz="1000" b="1" dirty="0">
+            <a:endParaRPr lang="en-US" sz="600" b="1" dirty="0">
               <a:solidFill>
                 <a:srgbClr val="6FC2B4"/>
               </a:solidFill>
@@ -18235,7 +18147,7 @@
               <a:defRPr/>
             </a:pPr>
             <a:r>
-              <a:rPr lang="en-US" sz="1000" dirty="0" err="1">
+              <a:rPr lang="en-US" sz="900" dirty="0" err="1" b="0">
                 <a:solidFill>
                   <a:srgbClr val="000000"/>
                 </a:solidFill>
@@ -18243,129 +18155,44 @@
                 <a:ea typeface="Open Sans" panose="020B0606030504020204" pitchFamily="34" charset="0"/>
                 <a:cs typeface="Open Sans" panose="020B0606030504020204" pitchFamily="34" charset="0"/>
               </a:rPr>
-              <a:t>Desarrolló un agente de IA full-stack para un banco líder (reportes regulatorios e inteligencia de mercado, 90% menos tiempo de ejecución) y un modelo de pricing inteligente para un banco minorista que recomienda tasas de interés personalizadas por nivel de riesgo.</a:t>
-            </a:r>
-            <a:r>
-              <a:rPr lang="en-US" sz="1000" dirty="0">
-                <a:solidFill>
-                  <a:srgbClr val="000000"/>
+              <a:t>Desarrolló un agente de IA full-stack para un banco líder (reportes regulatorios e inteligencia de mercado, 90% menos tiempo de ejecución) y un modelo de pricing inteligente para un banco minorista.</a:t>
+            </a:r>
+          </a:p>
+          <a:p>
+            <a:pPr algn="just" fontAlgn="base"/>
+            <a:endParaRPr lang="en-US" sz="600" b="1" dirty="0">
+              <a:solidFill>
+                <a:srgbClr val="6FC2B4"/>
+              </a:solidFill>
+              <a:latin typeface="Open Sans" panose="020B0606030504020204" pitchFamily="34" charset="0"/>
+              <a:ea typeface="Open Sans" panose="020B0606030504020204" pitchFamily="34" charset="0"/>
+              <a:cs typeface="Open Sans" panose="020B0606030504020204" pitchFamily="34" charset="0"/>
+            </a:endParaRPr>
+          </a:p>
+          <a:p>
+            <a:pPr algn="just" fontAlgn="base"/>
+            <a:r>
+              <a:rPr lang="en-US" sz="900" b="1" dirty="0">
+                <a:solidFill>
+                  <a:srgbClr val="6FC2B4"/>
                 </a:solidFill>
                 <a:latin typeface="Open Sans" panose="020B0606030504020204" pitchFamily="34" charset="0"/>
                 <a:ea typeface="Open Sans" panose="020B0606030504020204" pitchFamily="34" charset="0"/>
                 <a:cs typeface="Open Sans" panose="020B0606030504020204" pitchFamily="34" charset="0"/>
               </a:rPr>
-              <a:t/>
-            </a:r>
-            <a:r>
-              <a:rPr lang="en-US" sz="1000" dirty="0" err="1">
-                <a:solidFill>
-                  <a:srgbClr val="000000"/>
-                </a:solidFill>
-                <a:latin typeface="Open Sans" panose="020B0606030504020204" pitchFamily="34" charset="0"/>
-                <a:ea typeface="Open Sans" panose="020B0606030504020204" pitchFamily="34" charset="0"/>
-                <a:cs typeface="Open Sans" panose="020B0606030504020204" pitchFamily="34" charset="0"/>
-              </a:rPr>
-              <a:t/>
-            </a:r>
-            <a:r>
-              <a:rPr lang="en-US" sz="1000" dirty="0">
-                <a:solidFill>
-                  <a:srgbClr val="000000"/>
-                </a:solidFill>
-                <a:latin typeface="Open Sans" panose="020B0606030504020204" pitchFamily="34" charset="0"/>
-                <a:ea typeface="Open Sans" panose="020B0606030504020204" pitchFamily="34" charset="0"/>
-                <a:cs typeface="Open Sans" panose="020B0606030504020204" pitchFamily="34" charset="0"/>
-              </a:rPr>
-              <a:t/>
-            </a:r>
-            <a:r>
-              <a:rPr lang="en-US" sz="1000" dirty="0" err="1">
-                <a:solidFill>
-                  <a:srgbClr val="000000"/>
-                </a:solidFill>
-                <a:latin typeface="Open Sans" panose="020B0606030504020204" pitchFamily="34" charset="0"/>
-                <a:ea typeface="Open Sans" panose="020B0606030504020204" pitchFamily="34" charset="0"/>
-                <a:cs typeface="Open Sans" panose="020B0606030504020204" pitchFamily="34" charset="0"/>
-              </a:rPr>
-              <a:t/>
-            </a:r>
-            <a:r>
-              <a:rPr lang="en-US" sz="1000" dirty="0">
-                <a:solidFill>
-                  <a:srgbClr val="000000"/>
-                </a:solidFill>
-                <a:latin typeface="Open Sans" panose="020B0606030504020204" pitchFamily="34" charset="0"/>
-                <a:ea typeface="Open Sans" panose="020B0606030504020204" pitchFamily="34" charset="0"/>
-                <a:cs typeface="Open Sans" panose="020B0606030504020204" pitchFamily="34" charset="0"/>
-              </a:rPr>
-              <a:t/>
-            </a:r>
-            <a:r>
-              <a:rPr lang="en-US" sz="1000" dirty="0" err="1">
-                <a:solidFill>
-                  <a:srgbClr val="000000"/>
-                </a:solidFill>
-                <a:latin typeface="Open Sans" panose="020B0606030504020204" pitchFamily="34" charset="0"/>
-                <a:ea typeface="Open Sans" panose="020B0606030504020204" pitchFamily="34" charset="0"/>
-                <a:cs typeface="Open Sans" panose="020B0606030504020204" pitchFamily="34" charset="0"/>
-              </a:rPr>
-              <a:t/>
-            </a:r>
-            <a:r>
-              <a:rPr lang="en-US" sz="1000" dirty="0">
-                <a:solidFill>
-                  <a:srgbClr val="000000"/>
-                </a:solidFill>
-                <a:latin typeface="Open Sans" panose="020B0606030504020204" pitchFamily="34" charset="0"/>
-                <a:ea typeface="Open Sans" panose="020B0606030504020204" pitchFamily="34" charset="0"/>
-                <a:cs typeface="Open Sans" panose="020B0606030504020204" pitchFamily="34" charset="0"/>
-              </a:rPr>
-              <a:t/>
-            </a:r>
-            <a:r>
-              <a:rPr lang="en-US" sz="1000" dirty="0" err="1">
-                <a:solidFill>
-                  <a:srgbClr val="000000"/>
-                </a:solidFill>
-                <a:latin typeface="Open Sans" panose="020B0606030504020204" pitchFamily="34" charset="0"/>
-                <a:ea typeface="Open Sans" panose="020B0606030504020204" pitchFamily="34" charset="0"/>
-                <a:cs typeface="Open Sans" panose="020B0606030504020204" pitchFamily="34" charset="0"/>
-              </a:rPr>
-              <a:t/>
-            </a:r>
-            <a:r>
-              <a:rPr lang="en-US" sz="1000" dirty="0">
-                <a:solidFill>
-                  <a:srgbClr val="000000"/>
-                </a:solidFill>
-                <a:latin typeface="Open Sans" panose="020B0606030504020204" pitchFamily="34" charset="0"/>
-                <a:ea typeface="Open Sans" panose="020B0606030504020204" pitchFamily="34" charset="0"/>
-                <a:cs typeface="Open Sans" panose="020B0606030504020204" pitchFamily="34" charset="0"/>
-              </a:rPr>
-              <a:t/>
-            </a:r>
-            <a:r>
-              <a:rPr lang="en-US" sz="1000" dirty="0" err="1">
-                <a:solidFill>
-                  <a:srgbClr val="000000"/>
-                </a:solidFill>
-                <a:latin typeface="Open Sans" panose="020B0606030504020204" pitchFamily="34" charset="0"/>
-                <a:ea typeface="Open Sans" panose="020B0606030504020204" pitchFamily="34" charset="0"/>
-                <a:cs typeface="Open Sans" panose="020B0606030504020204" pitchFamily="34" charset="0"/>
-              </a:rPr>
-              <a:t/>
-            </a:r>
-            <a:r>
-              <a:rPr lang="en-US" sz="1000" dirty="0">
-                <a:solidFill>
-                  <a:srgbClr val="000000"/>
-                </a:solidFill>
-                <a:latin typeface="Open Sans" panose="020B0606030504020204" pitchFamily="34" charset="0"/>
-                <a:ea typeface="Open Sans" panose="020B0606030504020204" pitchFamily="34" charset="0"/>
-                <a:cs typeface="Open Sans" panose="020B0606030504020204" pitchFamily="34" charset="0"/>
-              </a:rPr>
-              <a:t/>
-            </a:r>
+              <a:t>Deloitte | Consultor Senior | Energía y Sector Público | 2023 – Actualidad</a:t>
+            </a:r>
+          </a:p>
+          <a:p>
+            <a:pPr algn="just" fontAlgn="base"/>
+            <a:endParaRPr lang="en-US" sz="600" b="1" dirty="0">
+              <a:solidFill>
+                <a:srgbClr val="6FC2B4"/>
+              </a:solidFill>
+              <a:latin typeface="Open Sans" panose="020B0606030504020204" pitchFamily="34" charset="0"/>
+              <a:ea typeface="Open Sans" panose="020B0606030504020204" pitchFamily="34" charset="0"/>
+              <a:cs typeface="Open Sans" panose="020B0606030504020204" pitchFamily="34" charset="0"/>
+            </a:endParaRPr>
           </a:p>
           <a:p>
             <a:pPr marL="171450" indent="-171450" defTabSz="1217613" eaLnBrk="0" fontAlgn="base" hangingPunct="0">
@@ -18383,11 +18210,49 @@
               <a:buChar char="o"/>
               <a:defRPr/>
             </a:pPr>
-            <a:endParaRPr lang="en-US" sz="1000" b="0" i="0" dirty="0">
+            <a:r>
+              <a:rPr lang="en-US" sz="900" dirty="0" err="1" b="0">
+                <a:solidFill>
+                  <a:srgbClr val="000000"/>
+                </a:solidFill>
+                <a:latin typeface="Open Sans" panose="020B0606030504020204" pitchFamily="34" charset="0"/>
+                <a:ea typeface="Open Sans" panose="020B0606030504020204" pitchFamily="34" charset="0"/>
+                <a:cs typeface="Open Sans" panose="020B0606030504020204" pitchFamily="34" charset="0"/>
+              </a:rPr>
+              <a:t>Extrajo, limpió y estructuró 10 años de datos de generación eléctrica nacional para un sistema de pronóstico que informó decisiones de inversión energética.</a:t>
+            </a:r>
+          </a:p>
+          <a:p>
+            <a:pPr algn="just" fontAlgn="base"/>
+            <a:endParaRPr lang="en-US" sz="600" b="1" dirty="0">
               <a:solidFill>
-                <a:srgbClr val="000000"/>
+                <a:srgbClr val="6FC2B4"/>
               </a:solidFill>
-              <a:effectLst/>
+              <a:latin typeface="Open Sans" panose="020B0606030504020204" pitchFamily="34" charset="0"/>
+              <a:ea typeface="Open Sans" panose="020B0606030504020204" pitchFamily="34" charset="0"/>
+              <a:cs typeface="Open Sans" panose="020B0606030504020204" pitchFamily="34" charset="0"/>
+            </a:endParaRPr>
+          </a:p>
+          <a:p>
+            <a:pPr algn="just" fontAlgn="base"/>
+            <a:r>
+              <a:rPr lang="en-US" sz="900" b="1" dirty="0">
+                <a:solidFill>
+                  <a:srgbClr val="6FC2B4"/>
+                </a:solidFill>
+                <a:latin typeface="Open Sans" panose="020B0606030504020204" pitchFamily="34" charset="0"/>
+                <a:ea typeface="Open Sans" panose="020B0606030504020204" pitchFamily="34" charset="0"/>
+                <a:cs typeface="Open Sans" panose="020B0606030504020204" pitchFamily="34" charset="0"/>
+              </a:rPr>
+              <a:t>Deloitte | Consultor Senior | Hospitalidad y Bienes Raíces | 2023 – Actualidad</a:t>
+            </a:r>
+          </a:p>
+          <a:p>
+            <a:pPr algn="just" fontAlgn="base"/>
+            <a:endParaRPr lang="en-US" sz="600" b="1" dirty="0">
+              <a:solidFill>
+                <a:srgbClr val="6FC2B4"/>
+              </a:solidFill>
               <a:latin typeface="Open Sans" panose="020B0606030504020204" pitchFamily="34" charset="0"/>
               <a:ea typeface="Open Sans" panose="020B0606030504020204" pitchFamily="34" charset="0"/>
               <a:cs typeface="Open Sans" panose="020B0606030504020204" pitchFamily="34" charset="0"/>
@@ -18409,9 +18274,48 @@
               <a:buChar char="o"/>
               <a:defRPr/>
             </a:pPr>
-            <a:endParaRPr lang="en-US" sz="1000" dirty="0">
+            <a:r>
+              <a:rPr lang="en-US" sz="900" dirty="0" err="1" b="0">
+                <a:solidFill>
+                  <a:srgbClr val="000000"/>
+                </a:solidFill>
+                <a:latin typeface="Open Sans" panose="020B0606030504020204" pitchFamily="34" charset="0"/>
+                <a:ea typeface="Open Sans" panose="020B0606030504020204" pitchFamily="34" charset="0"/>
+                <a:cs typeface="Open Sans" panose="020B0606030504020204" pitchFamily="34" charset="0"/>
+              </a:rPr>
+              <a:t>Diseñó un plan de crecimiento a 10 años para un grupo hotelero valuado en más de USD $1,000M (valor presente adicional de USD $100M+) y un modelo de valuación de terrenos.</a:t>
+            </a:r>
+          </a:p>
+          <a:p>
+            <a:pPr algn="just" fontAlgn="base"/>
+            <a:endParaRPr lang="en-US" sz="600" b="1" dirty="0">
               <a:solidFill>
-                <a:srgbClr val="000000"/>
+                <a:srgbClr val="6FC2B4"/>
+              </a:solidFill>
+              <a:latin typeface="Open Sans" panose="020B0606030504020204" pitchFamily="34" charset="0"/>
+              <a:ea typeface="Open Sans" panose="020B0606030504020204" pitchFamily="34" charset="0"/>
+              <a:cs typeface="Open Sans" panose="020B0606030504020204" pitchFamily="34" charset="0"/>
+            </a:endParaRPr>
+          </a:p>
+          <a:p>
+            <a:pPr algn="just" fontAlgn="base"/>
+            <a:r>
+              <a:rPr lang="en-US" sz="900" b="1" dirty="0">
+                <a:solidFill>
+                  <a:srgbClr val="6FC2B4"/>
+                </a:solidFill>
+                <a:latin typeface="Open Sans" panose="020B0606030504020204" pitchFamily="34" charset="0"/>
+                <a:ea typeface="Open Sans" panose="020B0606030504020204" pitchFamily="34" charset="0"/>
+                <a:cs typeface="Open Sans" panose="020B0606030504020204" pitchFamily="34" charset="0"/>
+              </a:rPr>
+              <a:t>Deloitte | Consultor Senior | Retail y Comercio | 2023 – Actualidad</a:t>
+            </a:r>
+          </a:p>
+          <a:p>
+            <a:pPr algn="just" fontAlgn="base"/>
+            <a:endParaRPr lang="en-US" sz="600" b="1" dirty="0">
+              <a:solidFill>
+                <a:srgbClr val="6FC2B4"/>
               </a:solidFill>
               <a:latin typeface="Open Sans" panose="020B0606030504020204" pitchFamily="34" charset="0"/>
               <a:ea typeface="Open Sans" panose="020B0606030504020204" pitchFamily="34" charset="0"/>
@@ -18434,493 +18338,21 @@
               <a:buChar char="o"/>
               <a:defRPr/>
             </a:pPr>
-            <a:endParaRPr lang="en-US" sz="1000" b="0" i="0" dirty="0">
-              <a:solidFill>
-                <a:srgbClr val="000000"/>
-              </a:solidFill>
-              <a:effectLst/>
-              <a:latin typeface="Open Sans" panose="020B0606030504020204" pitchFamily="34" charset="0"/>
-              <a:ea typeface="Open Sans" panose="020B0606030504020204" pitchFamily="34" charset="0"/>
-              <a:cs typeface="Open Sans" panose="020B0606030504020204" pitchFamily="34" charset="0"/>
-            </a:endParaRPr>
-          </a:p>
-          <a:p>
-            <a:pPr marL="171450" indent="-171450" defTabSz="1217613" eaLnBrk="0" fontAlgn="base" hangingPunct="0">
-              <a:spcBef>
-                <a:spcPts val="200"/>
-              </a:spcBef>
-              <a:spcAft>
-                <a:spcPct val="0"/>
-              </a:spcAft>
-              <a:buClr>
-                <a:srgbClr val="009A44"/>
-              </a:buClr>
-              <a:buSzPct val="140000"/>
-              <a:buFont typeface="Courier New" panose="02070309020205020404" pitchFamily="49" charset="0"/>
-              <a:buChar char="o"/>
-              <a:defRPr/>
-            </a:pPr>
-            <a:endParaRPr lang="en-US" sz="1000" b="0" i="0" dirty="0">
-              <a:solidFill>
-                <a:srgbClr val="000000"/>
-              </a:solidFill>
-              <a:effectLst/>
-              <a:latin typeface="Open Sans" panose="020B0606030504020204" pitchFamily="34" charset="0"/>
-              <a:ea typeface="Open Sans" panose="020B0606030504020204" pitchFamily="34" charset="0"/>
-              <a:cs typeface="Open Sans" panose="020B0606030504020204" pitchFamily="34" charset="0"/>
-            </a:endParaRPr>
-          </a:p>
-          <a:p>
-            <a:pPr marL="171450" indent="-171450" defTabSz="1217613" eaLnBrk="0" fontAlgn="base" hangingPunct="0">
-              <a:spcBef>
-                <a:spcPts val="200"/>
-              </a:spcBef>
-              <a:spcAft>
-                <a:spcPct val="0"/>
-              </a:spcAft>
-              <a:buClr>
-                <a:srgbClr val="009A44"/>
-              </a:buClr>
-              <a:buSzPct val="140000"/>
-              <a:buFont typeface="Courier New" panose="02070309020205020404" pitchFamily="49" charset="0"/>
-              <a:buChar char="o"/>
-              <a:defRPr/>
-            </a:pPr>
-            <a:endParaRPr lang="en-US" sz="1000" b="0" i="0" dirty="0">
-              <a:solidFill>
-                <a:srgbClr val="000000"/>
-              </a:solidFill>
-              <a:effectLst/>
-              <a:latin typeface="Open Sans" panose="020B0606030504020204" pitchFamily="34" charset="0"/>
-              <a:ea typeface="Open Sans" panose="020B0606030504020204" pitchFamily="34" charset="0"/>
-              <a:cs typeface="Open Sans" panose="020B0606030504020204" pitchFamily="34" charset="0"/>
-            </a:endParaRPr>
-          </a:p>
-          <a:p>
-            <a:pPr algn="just" fontAlgn="base"/>
-            <a:endParaRPr lang="en-US" sz="1000" b="0" i="0" dirty="0">
-              <a:solidFill>
-                <a:srgbClr val="000000"/>
-              </a:solidFill>
-              <a:effectLst/>
-              <a:latin typeface="Open Sans" panose="020B0606030504020204" pitchFamily="34" charset="0"/>
-              <a:ea typeface="Open Sans" panose="020B0606030504020204" pitchFamily="34" charset="0"/>
-              <a:cs typeface="Open Sans" panose="020B0606030504020204" pitchFamily="34" charset="0"/>
-            </a:endParaRPr>
-          </a:p>
-          <a:p>
-            <a:pPr algn="just" fontAlgn="base"/>
-            <a:r>
-              <a:rPr lang="en-US" sz="1000" b="1" dirty="0">
-                <a:solidFill>
-                  <a:srgbClr val="6FC2B4"/>
+            <a:r>
+              <a:rPr lang="en-US" sz="900" dirty="0" err="1" b="0">
+                <a:solidFill>
+                  <a:srgbClr val="000000"/>
                 </a:solidFill>
                 <a:latin typeface="Open Sans" panose="020B0606030504020204" pitchFamily="34" charset="0"/>
                 <a:ea typeface="Open Sans" panose="020B0606030504020204" pitchFamily="34" charset="0"/>
                 <a:cs typeface="Open Sans" panose="020B0606030504020204" pitchFamily="34" charset="0"/>
               </a:rPr>
-              <a:t>Deloitte | Consultor Senior | Hospitalidad y Bienes Raíces | 2023 – Actualidad</a:t>
-            </a:r>
-            <a:r>
-              <a:rPr lang="en-US" sz="1000" b="1" dirty="0" err="1">
-                <a:solidFill>
-                  <a:srgbClr val="6FC2B4"/>
-                </a:solidFill>
-                <a:latin typeface="Open Sans" panose="020B0606030504020204" pitchFamily="34" charset="0"/>
-                <a:ea typeface="Open Sans" panose="020B0606030504020204" pitchFamily="34" charset="0"/>
-                <a:cs typeface="Open Sans" panose="020B0606030504020204" pitchFamily="34" charset="0"/>
-              </a:rPr>
-              <a:t/>
-            </a:r>
-            <a:r>
-              <a:rPr lang="en-US" sz="1000" b="1" dirty="0">
-                <a:solidFill>
-                  <a:srgbClr val="6FC2B4"/>
-                </a:solidFill>
-                <a:latin typeface="Open Sans" panose="020B0606030504020204" pitchFamily="34" charset="0"/>
-                <a:ea typeface="Open Sans" panose="020B0606030504020204" pitchFamily="34" charset="0"/>
-                <a:cs typeface="Open Sans" panose="020B0606030504020204" pitchFamily="34" charset="0"/>
-              </a:rPr>
-              <a:t/>
-            </a:r>
-            <a:r>
-              <a:rPr lang="en-US" sz="1000" b="1" dirty="0" err="1">
-                <a:solidFill>
-                  <a:srgbClr val="6FC2B4"/>
-                </a:solidFill>
-                <a:latin typeface="Open Sans" panose="020B0606030504020204" pitchFamily="34" charset="0"/>
-                <a:ea typeface="Open Sans" panose="020B0606030504020204" pitchFamily="34" charset="0"/>
-                <a:cs typeface="Open Sans" panose="020B0606030504020204" pitchFamily="34" charset="0"/>
-              </a:rPr>
-              <a:t/>
-            </a:r>
-            <a:r>
-              <a:rPr lang="en-US" sz="1000" b="1" dirty="0">
-                <a:solidFill>
-                  <a:srgbClr val="6FC2B4"/>
-                </a:solidFill>
-                <a:latin typeface="Open Sans" panose="020B0606030504020204" pitchFamily="34" charset="0"/>
-                <a:ea typeface="Open Sans" panose="020B0606030504020204" pitchFamily="34" charset="0"/>
-                <a:cs typeface="Open Sans" panose="020B0606030504020204" pitchFamily="34" charset="0"/>
-              </a:rPr>
-              <a:t/>
-            </a:r>
-            <a:r>
-              <a:rPr lang="en-US" sz="1000" b="1" dirty="0" err="1">
-                <a:solidFill>
-                  <a:srgbClr val="6FC2B4"/>
-                </a:solidFill>
-                <a:latin typeface="Open Sans" panose="020B0606030504020204" pitchFamily="34" charset="0"/>
-                <a:ea typeface="Open Sans" panose="020B0606030504020204" pitchFamily="34" charset="0"/>
-                <a:cs typeface="Open Sans" panose="020B0606030504020204" pitchFamily="34" charset="0"/>
-              </a:rPr>
-              <a:t/>
-            </a:r>
-            <a:r>
-              <a:rPr lang="en-US" sz="1000" b="1" dirty="0">
-                <a:solidFill>
-                  <a:srgbClr val="6FC2B4"/>
-                </a:solidFill>
-                <a:latin typeface="Open Sans" panose="020B0606030504020204" pitchFamily="34" charset="0"/>
-                <a:ea typeface="Open Sans" panose="020B0606030504020204" pitchFamily="34" charset="0"/>
-                <a:cs typeface="Open Sans" panose="020B0606030504020204" pitchFamily="34" charset="0"/>
-              </a:rPr>
-              <a:t/>
-            </a:r>
-            <a:r>
-              <a:rPr lang="en-US" sz="1000" b="1" dirty="0" err="1">
-                <a:solidFill>
-                  <a:srgbClr val="6FC2B4"/>
-                </a:solidFill>
-                <a:latin typeface="Open Sans" panose="020B0606030504020204" pitchFamily="34" charset="0"/>
-                <a:ea typeface="Open Sans" panose="020B0606030504020204" pitchFamily="34" charset="0"/>
-                <a:cs typeface="Open Sans" panose="020B0606030504020204" pitchFamily="34" charset="0"/>
-              </a:rPr>
-              <a:t/>
-            </a:r>
-            <a:r>
-              <a:rPr lang="en-US" sz="1000" b="1" dirty="0">
-                <a:solidFill>
-                  <a:srgbClr val="6FC2B4"/>
-                </a:solidFill>
-                <a:latin typeface="Open Sans" panose="020B0606030504020204" pitchFamily="34" charset="0"/>
-                <a:ea typeface="Open Sans" panose="020B0606030504020204" pitchFamily="34" charset="0"/>
-                <a:cs typeface="Open Sans" panose="020B0606030504020204" pitchFamily="34" charset="0"/>
-              </a:rPr>
-              <a:t/>
-            </a:r>
-          </a:p>
-          <a:p>
-            <a:pPr algn="just" defTabSz="1217613" eaLnBrk="0" fontAlgn="base" hangingPunct="0">
-              <a:spcBef>
-                <a:spcPts val="200"/>
-              </a:spcBef>
-              <a:spcAft>
-                <a:spcPct val="0"/>
-              </a:spcAft>
-              <a:buSzPct val="140000"/>
-              <a:defRPr/>
-            </a:pPr>
-            <a:endParaRPr lang="es-MX" sz="1000" b="1" dirty="0">
-              <a:solidFill>
-                <a:srgbClr val="6FC2B4"/>
-              </a:solidFill>
-              <a:latin typeface="Open Sans" panose="020B0606030504020204" pitchFamily="34" charset="0"/>
-              <a:ea typeface="Open Sans" panose="020B0606030504020204" pitchFamily="34" charset="0"/>
-              <a:cs typeface="Open Sans" panose="020B0606030504020204" pitchFamily="34" charset="0"/>
-            </a:endParaRPr>
-          </a:p>
-          <a:p>
-            <a:pPr marL="171450" indent="-171450" defTabSz="1217613" eaLnBrk="0" fontAlgn="base" hangingPunct="0">
-              <a:spcBef>
-                <a:spcPts val="200"/>
-              </a:spcBef>
-              <a:spcAft>
-                <a:spcPct val="0"/>
-              </a:spcAft>
-              <a:buClr>
-                <a:srgbClr val="009A44"/>
-              </a:buClr>
-              <a:buSzPct val="140000"/>
-              <a:buFont typeface="Courier New" panose="02070309020205020404" pitchFamily="49" charset="0"/>
-              <a:buChar char="o"/>
-              <a:defRPr/>
-            </a:pPr>
-            <a:r>
-              <a:rPr lang="en-US" sz="1000" dirty="0" err="1">
-                <a:solidFill>
-                  <a:srgbClr val="000000"/>
-                </a:solidFill>
-                <a:latin typeface="Open Sans" panose="020B0606030504020204" pitchFamily="34" charset="0"/>
-                <a:ea typeface="Open Sans" panose="020B0606030504020204" pitchFamily="34" charset="0"/>
-                <a:cs typeface="Open Sans" panose="020B0606030504020204" pitchFamily="34" charset="0"/>
-              </a:rPr>
-              <a:t>Diseñó un plan de crecimiento a 10 años para un grupo hotelero valuado en más de USD $1,000M (valor presente adicional de USD $100M+) y un modelo de valuación de terrenos basado en modelos lineales.</a:t>
-            </a:r>
-            <a:r>
-              <a:rPr lang="en-US" sz="1000" dirty="0">
-                <a:solidFill>
-                  <a:srgbClr val="000000"/>
-                </a:solidFill>
-                <a:latin typeface="Open Sans" panose="020B0606030504020204" pitchFamily="34" charset="0"/>
-                <a:ea typeface="Open Sans" panose="020B0606030504020204" pitchFamily="34" charset="0"/>
-                <a:cs typeface="Open Sans" panose="020B0606030504020204" pitchFamily="34" charset="0"/>
-              </a:rPr>
-              <a:t/>
-            </a:r>
-            <a:r>
-              <a:rPr lang="en-US" sz="1000" dirty="0" err="1">
-                <a:solidFill>
-                  <a:srgbClr val="000000"/>
-                </a:solidFill>
-                <a:latin typeface="Open Sans" panose="020B0606030504020204" pitchFamily="34" charset="0"/>
-                <a:ea typeface="Open Sans" panose="020B0606030504020204" pitchFamily="34" charset="0"/>
-                <a:cs typeface="Open Sans" panose="020B0606030504020204" pitchFamily="34" charset="0"/>
-              </a:rPr>
-              <a:t/>
-            </a:r>
-            <a:r>
-              <a:rPr lang="en-US" sz="1000" dirty="0">
-                <a:solidFill>
-                  <a:srgbClr val="000000"/>
-                </a:solidFill>
-                <a:latin typeface="Open Sans" panose="020B0606030504020204" pitchFamily="34" charset="0"/>
-                <a:ea typeface="Open Sans" panose="020B0606030504020204" pitchFamily="34" charset="0"/>
-                <a:cs typeface="Open Sans" panose="020B0606030504020204" pitchFamily="34" charset="0"/>
-              </a:rPr>
-              <a:t/>
-            </a:r>
-            <a:r>
-              <a:rPr lang="en-US" sz="1000" dirty="0" err="1">
-                <a:solidFill>
-                  <a:srgbClr val="000000"/>
-                </a:solidFill>
-                <a:latin typeface="Open Sans" panose="020B0606030504020204" pitchFamily="34" charset="0"/>
-                <a:ea typeface="Open Sans" panose="020B0606030504020204" pitchFamily="34" charset="0"/>
-                <a:cs typeface="Open Sans" panose="020B0606030504020204" pitchFamily="34" charset="0"/>
-              </a:rPr>
-              <a:t/>
-            </a:r>
-            <a:r>
-              <a:rPr lang="en-US" sz="1000" dirty="0">
-                <a:solidFill>
-                  <a:srgbClr val="000000"/>
-                </a:solidFill>
-                <a:latin typeface="Open Sans" panose="020B0606030504020204" pitchFamily="34" charset="0"/>
-                <a:ea typeface="Open Sans" panose="020B0606030504020204" pitchFamily="34" charset="0"/>
-                <a:cs typeface="Open Sans" panose="020B0606030504020204" pitchFamily="34" charset="0"/>
-              </a:rPr>
-              <a:t/>
-            </a:r>
-            <a:r>
-              <a:rPr lang="en-US" sz="1000" dirty="0" err="1">
-                <a:solidFill>
-                  <a:srgbClr val="000000"/>
-                </a:solidFill>
-                <a:latin typeface="Open Sans" panose="020B0606030504020204" pitchFamily="34" charset="0"/>
-                <a:ea typeface="Open Sans" panose="020B0606030504020204" pitchFamily="34" charset="0"/>
-                <a:cs typeface="Open Sans" panose="020B0606030504020204" pitchFamily="34" charset="0"/>
-              </a:rPr>
-              <a:t/>
-            </a:r>
-            <a:r>
-              <a:rPr lang="en-US" sz="1000" dirty="0">
-                <a:solidFill>
-                  <a:srgbClr val="000000"/>
-                </a:solidFill>
-                <a:latin typeface="Open Sans" panose="020B0606030504020204" pitchFamily="34" charset="0"/>
-                <a:ea typeface="Open Sans" panose="020B0606030504020204" pitchFamily="34" charset="0"/>
-                <a:cs typeface="Open Sans" panose="020B0606030504020204" pitchFamily="34" charset="0"/>
-              </a:rPr>
-              <a:t/>
-            </a:r>
-            <a:r>
-              <a:rPr lang="en-US" sz="1000" dirty="0" err="1">
-                <a:solidFill>
-                  <a:srgbClr val="000000"/>
-                </a:solidFill>
-                <a:latin typeface="Open Sans" panose="020B0606030504020204" pitchFamily="34" charset="0"/>
-                <a:ea typeface="Open Sans" panose="020B0606030504020204" pitchFamily="34" charset="0"/>
-                <a:cs typeface="Open Sans" panose="020B0606030504020204" pitchFamily="34" charset="0"/>
-              </a:rPr>
-              <a:t/>
-            </a:r>
-            <a:r>
-              <a:rPr lang="en-US" sz="1000" dirty="0">
-                <a:solidFill>
-                  <a:srgbClr val="000000"/>
-                </a:solidFill>
-                <a:latin typeface="Open Sans" panose="020B0606030504020204" pitchFamily="34" charset="0"/>
-                <a:ea typeface="Open Sans" panose="020B0606030504020204" pitchFamily="34" charset="0"/>
-                <a:cs typeface="Open Sans" panose="020B0606030504020204" pitchFamily="34" charset="0"/>
-              </a:rPr>
-              <a:t/>
-            </a:r>
-            <a:r>
-              <a:rPr lang="en-US" sz="1000" dirty="0" err="1">
-                <a:solidFill>
-                  <a:srgbClr val="000000"/>
-                </a:solidFill>
-                <a:latin typeface="Open Sans" panose="020B0606030504020204" pitchFamily="34" charset="0"/>
-                <a:ea typeface="Open Sans" panose="020B0606030504020204" pitchFamily="34" charset="0"/>
-                <a:cs typeface="Open Sans" panose="020B0606030504020204" pitchFamily="34" charset="0"/>
-              </a:rPr>
-              <a:t/>
-            </a:r>
-            <a:r>
-              <a:rPr lang="en-US" sz="1000" dirty="0">
-                <a:solidFill>
-                  <a:srgbClr val="000000"/>
-                </a:solidFill>
-                <a:latin typeface="Open Sans" panose="020B0606030504020204" pitchFamily="34" charset="0"/>
-                <a:ea typeface="Open Sans" panose="020B0606030504020204" pitchFamily="34" charset="0"/>
-                <a:cs typeface="Open Sans" panose="020B0606030504020204" pitchFamily="34" charset="0"/>
-              </a:rPr>
-              <a:t/>
-            </a:r>
-          </a:p>
-          <a:p>
-            <a:pPr defTabSz="1217613" eaLnBrk="0" fontAlgn="base" hangingPunct="0">
-              <a:spcBef>
-                <a:spcPts val="200"/>
-              </a:spcBef>
-              <a:spcAft>
-                <a:spcPct val="0"/>
-              </a:spcAft>
-              <a:buClr>
-                <a:srgbClr val="009A44"/>
-              </a:buClr>
-              <a:buSzPct val="140000"/>
-              <a:defRPr/>
-            </a:pPr>
-            <a:endParaRPr lang="es-MX" sz="1000" dirty="0">
-              <a:latin typeface="Open Sans" panose="020B0606030504020204" pitchFamily="34" charset="0"/>
-              <a:ea typeface="Open Sans" panose="020B0606030504020204" pitchFamily="34" charset="0"/>
-              <a:cs typeface="Open Sans" panose="020B0606030504020204" pitchFamily="34" charset="0"/>
-            </a:endParaRPr>
-          </a:p>
-          <a:p>
-            <a:pPr marL="171450" indent="-171450" defTabSz="1217613" eaLnBrk="0" fontAlgn="base" hangingPunct="0">
-              <a:spcBef>
-                <a:spcPts val="200"/>
-              </a:spcBef>
-              <a:spcAft>
-                <a:spcPct val="0"/>
-              </a:spcAft>
-              <a:buClr>
-                <a:srgbClr val="009A44"/>
-              </a:buClr>
-              <a:buSzPct val="140000"/>
-              <a:buFont typeface="Courier New" panose="02070309020205020404" pitchFamily="49" charset="0"/>
-              <a:buChar char="o"/>
-              <a:defRPr/>
-            </a:pPr>
-            <a:endParaRPr lang="es-MX" sz="1000" dirty="0">
-              <a:latin typeface="Open Sans" panose="020B0606030504020204" pitchFamily="34" charset="0"/>
-              <a:ea typeface="Open Sans" panose="020B0606030504020204" pitchFamily="34" charset="0"/>
-              <a:cs typeface="Open Sans" panose="020B0606030504020204" pitchFamily="34" charset="0"/>
-            </a:endParaRPr>
-          </a:p>
-          <a:p>
-            <a:pPr marL="171450" indent="-171450" defTabSz="1217613" eaLnBrk="0" fontAlgn="base" hangingPunct="0">
-              <a:spcBef>
-                <a:spcPts val="200"/>
-              </a:spcBef>
-              <a:spcAft>
-                <a:spcPct val="0"/>
-              </a:spcAft>
-              <a:buClr>
-                <a:srgbClr val="009A44"/>
-              </a:buClr>
-              <a:buSzPct val="140000"/>
-              <a:buFont typeface="Courier New" panose="02070309020205020404" pitchFamily="49" charset="0"/>
-              <a:buChar char="o"/>
-              <a:defRPr/>
-            </a:pPr>
-            <a:endParaRPr lang="es-MX" sz="1000" dirty="0">
-              <a:latin typeface="Open Sans" panose="020B0606030504020204" pitchFamily="34" charset="0"/>
-              <a:ea typeface="Open Sans" panose="020B0606030504020204" pitchFamily="34" charset="0"/>
-              <a:cs typeface="Open Sans" panose="020B0606030504020204" pitchFamily="34" charset="0"/>
-            </a:endParaRPr>
-          </a:p>
-          <a:p>
-            <a:pPr marL="171450" indent="-171450" defTabSz="1217613" eaLnBrk="0" fontAlgn="base" hangingPunct="0">
-              <a:spcBef>
-                <a:spcPts val="200"/>
-              </a:spcBef>
-              <a:spcAft>
-                <a:spcPct val="0"/>
-              </a:spcAft>
-              <a:buClr>
-                <a:srgbClr val="009A44"/>
-              </a:buClr>
-              <a:buSzPct val="140000"/>
-              <a:buFont typeface="Courier New" panose="02070309020205020404" pitchFamily="49" charset="0"/>
-              <a:buChar char="o"/>
-              <a:defRPr/>
-            </a:pPr>
-            <a:endParaRPr lang="es-MX" sz="1000" dirty="0">
-              <a:latin typeface="Open Sans" panose="020B0606030504020204" pitchFamily="34" charset="0"/>
-              <a:ea typeface="Open Sans" panose="020B0606030504020204" pitchFamily="34" charset="0"/>
-              <a:cs typeface="Open Sans" panose="020B0606030504020204" pitchFamily="34" charset="0"/>
-            </a:endParaRPr>
-          </a:p>
-          <a:p>
-            <a:pPr marL="171450" indent="-171450" defTabSz="1217613" eaLnBrk="0" fontAlgn="base" hangingPunct="0">
-              <a:spcBef>
-                <a:spcPts val="200"/>
-              </a:spcBef>
-              <a:spcAft>
-                <a:spcPct val="0"/>
-              </a:spcAft>
-              <a:buClr>
-                <a:srgbClr val="009A44"/>
-              </a:buClr>
-              <a:buSzPct val="140000"/>
-              <a:buFont typeface="Courier New" panose="02070309020205020404" pitchFamily="49" charset="0"/>
-              <a:buChar char="o"/>
-              <a:defRPr/>
-            </a:pPr>
-            <a:endParaRPr lang="es-MX" sz="1000" dirty="0">
-              <a:latin typeface="Open Sans" panose="020B0606030504020204" pitchFamily="34" charset="0"/>
-              <a:ea typeface="Open Sans" panose="020B0606030504020204" pitchFamily="34" charset="0"/>
-              <a:cs typeface="Open Sans" panose="020B0606030504020204" pitchFamily="34" charset="0"/>
-            </a:endParaRPr>
-          </a:p>
-          <a:p>
-            <a:pPr marL="171450" indent="-171450" defTabSz="1217613" eaLnBrk="0" fontAlgn="base" hangingPunct="0">
-              <a:spcBef>
-                <a:spcPts val="200"/>
-              </a:spcBef>
-              <a:spcAft>
-                <a:spcPct val="0"/>
-              </a:spcAft>
-              <a:buClr>
-                <a:srgbClr val="009A44"/>
-              </a:buClr>
-              <a:buSzPct val="140000"/>
-              <a:buFont typeface="Courier New" panose="02070309020205020404" pitchFamily="49" charset="0"/>
-              <a:buChar char="o"/>
-              <a:defRPr/>
-            </a:pPr>
-            <a:endParaRPr lang="es-MX" sz="1000" dirty="0">
-              <a:latin typeface="Open Sans" panose="020B0606030504020204" pitchFamily="34" charset="0"/>
-              <a:ea typeface="Open Sans" panose="020B0606030504020204" pitchFamily="34" charset="0"/>
-              <a:cs typeface="Open Sans" panose="020B0606030504020204" pitchFamily="34" charset="0"/>
-            </a:endParaRPr>
-          </a:p>
-          <a:p>
-            <a:pPr algn="just" defTabSz="1217613" eaLnBrk="0" fontAlgn="base" hangingPunct="0">
-              <a:spcBef>
-                <a:spcPts val="200"/>
-              </a:spcBef>
-              <a:spcAft>
-                <a:spcPct val="0"/>
-              </a:spcAft>
-              <a:buSzPct val="140000"/>
-              <a:defRPr/>
-            </a:pPr>
-            <a:endParaRPr lang="en-US" sz="800" b="1" dirty="0">
+              <a:t>Automatizó la validación de ventas de vehículos en 200+ concesionarias (75% menos tiempo) y desarrolló un agente de IA de comercio con AWS, premiado en un hackathon de socios.</a:t>
+            </a:r>
+          </a:p>
+          <a:p>
+            <a:pPr algn="just" fontAlgn="base"/>
+            <a:endParaRPr lang="en-US" sz="600" b="1" dirty="0">
               <a:solidFill>
                 <a:srgbClr val="6FC2B4"/>
               </a:solidFill>
@@ -22202,7 +21634,7 @@
           <a:p>
             <a:pPr algn="just" fontAlgn="base"/>
             <a:r>
-              <a:rPr lang="en-US" sz="1000" b="1" dirty="0">
+              <a:rPr lang="en-US" sz="900" b="1" dirty="0">
                 <a:solidFill>
                   <a:srgbClr val="6FC2B4"/>
                 </a:solidFill>
@@ -22211,34 +21643,6 @@
                 <a:cs typeface="Open Sans" panose="020B0606030504020204" pitchFamily="34" charset="0"/>
               </a:rPr>
               <a:t>Deloitte | Senior Consultant | Banking | 2023 – Present</a:t>
-            </a:r>
-          </a:p>
-          <a:p>
-            <a:pPr marL="171450" indent="-171450" defTabSz="1217613" eaLnBrk="0" fontAlgn="base" hangingPunct="0">
-              <a:spcBef>
-                <a:spcPts val="200"/>
-              </a:spcBef>
-              <a:spcAft>
-                <a:spcPct val="0"/>
-              </a:spcAft>
-              <a:buClr>
-                <a:srgbClr val="009A44"/>
-              </a:buClr>
-              <a:buSzPct val="140000"/>
-              <a:buFont typeface="Courier New" panose="02070309020205020404" pitchFamily="49" charset="0"/>
-              <a:buChar char="o"/>
-              <a:defRPr/>
-            </a:pPr>
-            <a:r>
-              <a:rPr lang="en-US" sz="1000" dirty="0">
-                <a:solidFill>
-                  <a:srgbClr val="000000"/>
-                </a:solidFill>
-                <a:latin typeface="Open Sans" panose="020B0606030504020204" pitchFamily="34" charset="0"/>
-                <a:ea typeface="Open Sans" panose="020B0606030504020204" pitchFamily="34" charset="0"/>
-                <a:cs typeface="Open Sans" panose="020B0606030504020204" pitchFamily="34" charset="0"/>
-              </a:rPr>
-              <a:t>Built a full-stack AI agent for a leading bank (regulatory reporting and market intelligence, 90% less execution time) and a smart-pricing model for a retail bank recommending risk-adjusted, customer-tailored interest rates.</a:t>
             </a:r>
           </a:p>
           <a:p>
@@ -22261,7 +21665,7 @@
               <a:tabLst/>
               <a:defRPr/>
             </a:pPr>
-            <a:endParaRPr kumimoji="0" lang="en-US" sz="1000" b="0" i="0" u="none" strike="noStrike" kern="1200" cap="none" spc="0" normalizeH="0" baseline="0" noProof="0" dirty="0">
+            <a:endParaRPr kumimoji="0" lang="en-US" sz="600" b="0" i="0" u="none" strike="noStrike" kern="1200" cap="none" spc="0" normalizeH="0" baseline="0" noProof="0" dirty="0">
               <a:ln>
                 <a:noFill/>
               </a:ln>
@@ -22277,6 +21681,34 @@
             </a:endParaRPr>
           </a:p>
           <a:p>
+            <a:pPr marL="171450" indent="-171450" defTabSz="1217613" eaLnBrk="0" fontAlgn="base" hangingPunct="0">
+              <a:spcBef>
+                <a:spcPts val="200"/>
+              </a:spcBef>
+              <a:spcAft>
+                <a:spcPct val="0"/>
+              </a:spcAft>
+              <a:buClr>
+                <a:srgbClr val="009A44"/>
+              </a:buClr>
+              <a:buSzPct val="140000"/>
+              <a:buFont typeface="Courier New" panose="02070309020205020404" pitchFamily="49" charset="0"/>
+              <a:buChar char="o"/>
+              <a:defRPr/>
+            </a:pPr>
+            <a:r>
+              <a:rPr lang="en-US" sz="900" dirty="0" b="0">
+                <a:solidFill>
+                  <a:srgbClr val="000000"/>
+                </a:solidFill>
+                <a:latin typeface="Open Sans" panose="020B0606030504020204" pitchFamily="34" charset="0"/>
+                <a:ea typeface="Open Sans" panose="020B0606030504020204" pitchFamily="34" charset="0"/>
+                <a:cs typeface="Open Sans" panose="020B0606030504020204" pitchFamily="34" charset="0"/>
+              </a:rPr>
+              <a:t>Built a full-stack AI agent for a leading bank (regulatory reporting and market intelligence, 90% less execution time) and a smart-pricing model for a retail bank.</a:t>
+            </a:r>
+          </a:p>
+          <a:p>
             <a:pPr marL="0" marR="0" lvl="0" indent="0" algn="l" defTabSz="1217613" rtl="0" eaLnBrk="0" fontAlgn="base" latinLnBrk="0" hangingPunct="0">
               <a:lnSpc>
                 <a:spcPct val="100000"/>
@@ -22296,7 +21728,7 @@
               <a:tabLst/>
               <a:defRPr/>
             </a:pPr>
-            <a:endParaRPr kumimoji="0" lang="en-US" sz="1000" b="0" i="0" u="none" strike="noStrike" kern="1200" cap="none" spc="0" normalizeH="0" baseline="0" noProof="0" dirty="0">
+            <a:endParaRPr kumimoji="0" lang="en-US" sz="600" b="0" i="0" u="none" strike="noStrike" kern="1200" cap="none" spc="0" normalizeH="0" baseline="0" noProof="0" dirty="0">
               <a:ln>
                 <a:noFill/>
               </a:ln>
@@ -22312,6 +21744,20 @@
             </a:endParaRPr>
           </a:p>
           <a:p>
+            <a:pPr algn="just" fontAlgn="base"/>
+            <a:r>
+              <a:rPr lang="en-US" sz="900" b="1" dirty="0">
+                <a:solidFill>
+                  <a:srgbClr val="6FC2B4"/>
+                </a:solidFill>
+                <a:latin typeface="Open Sans" panose="020B0606030504020204" pitchFamily="34" charset="0"/>
+                <a:ea typeface="Open Sans" panose="020B0606030504020204" pitchFamily="34" charset="0"/>
+                <a:cs typeface="Open Sans" panose="020B0606030504020204" pitchFamily="34" charset="0"/>
+              </a:rPr>
+              <a:t>Deloitte | Senior Consultant | Energy &amp; Public Sector | 2023 – Present</a:t>
+            </a:r>
+          </a:p>
+          <a:p>
             <a:pPr marL="0" marR="0" lvl="0" indent="0" algn="l" defTabSz="1217613" rtl="0" eaLnBrk="0" fontAlgn="base" latinLnBrk="0" hangingPunct="0">
               <a:lnSpc>
                 <a:spcPct val="100000"/>
@@ -22331,7 +21777,7 @@
               <a:tabLst/>
               <a:defRPr/>
             </a:pPr>
-            <a:endParaRPr kumimoji="0" lang="en-US" sz="1000" b="0" i="0" u="none" strike="noStrike" kern="1200" cap="none" spc="0" normalizeH="0" baseline="0" noProof="0" dirty="0">
+            <a:endParaRPr kumimoji="0" lang="en-US" sz="600" b="0" i="0" u="none" strike="noStrike" kern="1200" cap="none" spc="0" normalizeH="0" baseline="0" noProof="0" dirty="0">
               <a:ln>
                 <a:noFill/>
               </a:ln>
@@ -22347,6 +21793,34 @@
             </a:endParaRPr>
           </a:p>
           <a:p>
+            <a:pPr marL="171450" indent="-171450" defTabSz="1217613" eaLnBrk="0" fontAlgn="base" hangingPunct="0">
+              <a:spcBef>
+                <a:spcPts val="200"/>
+              </a:spcBef>
+              <a:spcAft>
+                <a:spcPct val="0"/>
+              </a:spcAft>
+              <a:buClr>
+                <a:srgbClr val="009A44"/>
+              </a:buClr>
+              <a:buSzPct val="140000"/>
+              <a:buFont typeface="Courier New" panose="02070309020205020404" pitchFamily="49" charset="0"/>
+              <a:buChar char="o"/>
+              <a:defRPr/>
+            </a:pPr>
+            <a:r>
+              <a:rPr lang="en-US" sz="900" dirty="0" b="0">
+                <a:solidFill>
+                  <a:srgbClr val="000000"/>
+                </a:solidFill>
+                <a:latin typeface="Open Sans" panose="020B0606030504020204" pitchFamily="34" charset="0"/>
+                <a:ea typeface="Open Sans" panose="020B0606030504020204" pitchFamily="34" charset="0"/>
+                <a:cs typeface="Open Sans" panose="020B0606030504020204" pitchFamily="34" charset="0"/>
+              </a:rPr>
+              <a:t>Extracted, cleaned, and structured 10 years of nationwide power generation data for a forecasting system that informed national energy investment decisions.</a:t>
+            </a:r>
+          </a:p>
+          <a:p>
             <a:pPr marL="0" marR="0" lvl="0" indent="0" algn="l" defTabSz="1217613" rtl="0" eaLnBrk="0" fontAlgn="base" latinLnBrk="0" hangingPunct="0">
               <a:lnSpc>
                 <a:spcPct val="100000"/>
@@ -22366,7 +21840,7 @@
               <a:tabLst/>
               <a:defRPr/>
             </a:pPr>
-            <a:endParaRPr kumimoji="0" lang="en-US" sz="1000" b="0" i="0" u="none" strike="noStrike" kern="1200" cap="none" spc="0" normalizeH="0" baseline="0" noProof="0" dirty="0">
+            <a:endParaRPr kumimoji="0" lang="en-US" sz="600" b="0" i="0" u="none" strike="noStrike" kern="1200" cap="none" spc="0" normalizeH="0" baseline="0" noProof="0" dirty="0">
               <a:ln>
                 <a:noFill/>
               </a:ln>
@@ -22382,6 +21856,20 @@
             </a:endParaRPr>
           </a:p>
           <a:p>
+            <a:pPr algn="just" fontAlgn="base"/>
+            <a:r>
+              <a:rPr lang="en-US" sz="900" b="1" dirty="0">
+                <a:solidFill>
+                  <a:srgbClr val="6FC2B4"/>
+                </a:solidFill>
+                <a:latin typeface="Open Sans" panose="020B0606030504020204" pitchFamily="34" charset="0"/>
+                <a:ea typeface="Open Sans" panose="020B0606030504020204" pitchFamily="34" charset="0"/>
+                <a:cs typeface="Open Sans" panose="020B0606030504020204" pitchFamily="34" charset="0"/>
+              </a:rPr>
+              <a:t>Deloitte | Senior Consultant | Hospitality &amp; Real Estate | 2023 – Present</a:t>
+            </a:r>
+          </a:p>
+          <a:p>
             <a:pPr marL="0" marR="0" lvl="0" indent="0" algn="l" defTabSz="1217613" rtl="0" eaLnBrk="0" fontAlgn="base" latinLnBrk="0" hangingPunct="0">
               <a:lnSpc>
                 <a:spcPct val="100000"/>
@@ -22401,7 +21889,7 @@
               <a:tabLst/>
               <a:defRPr/>
             </a:pPr>
-            <a:endParaRPr kumimoji="0" lang="en-US" sz="1000" b="0" i="0" u="none" strike="noStrike" kern="1200" cap="none" spc="0" normalizeH="0" baseline="0" noProof="0" dirty="0">
+            <a:endParaRPr kumimoji="0" lang="en-US" sz="600" b="0" i="0" u="none" strike="noStrike" kern="1200" cap="none" spc="0" normalizeH="0" baseline="0" noProof="0" dirty="0">
               <a:ln>
                 <a:noFill/>
               </a:ln>
@@ -22417,6 +21905,34 @@
             </a:endParaRPr>
           </a:p>
           <a:p>
+            <a:pPr marL="171450" indent="-171450" defTabSz="1217613" eaLnBrk="0" fontAlgn="base" hangingPunct="0">
+              <a:spcBef>
+                <a:spcPts val="200"/>
+              </a:spcBef>
+              <a:spcAft>
+                <a:spcPct val="0"/>
+              </a:spcAft>
+              <a:buClr>
+                <a:srgbClr val="009A44"/>
+              </a:buClr>
+              <a:buSzPct val="140000"/>
+              <a:buFont typeface="Courier New" panose="02070309020205020404" pitchFamily="49" charset="0"/>
+              <a:buChar char="o"/>
+              <a:defRPr/>
+            </a:pPr>
+            <a:r>
+              <a:rPr lang="en-US" sz="900" dirty="0" b="0">
+                <a:solidFill>
+                  <a:srgbClr val="000000"/>
+                </a:solidFill>
+                <a:latin typeface="Open Sans" panose="020B0606030504020204" pitchFamily="34" charset="0"/>
+                <a:ea typeface="Open Sans" panose="020B0606030504020204" pitchFamily="34" charset="0"/>
+                <a:cs typeface="Open Sans" panose="020B0606030504020204" pitchFamily="34" charset="0"/>
+              </a:rPr>
+              <a:t>Designed a 10-year growth plan for a hotel group valued at over USD $1B (additional present value of USD $100M+) and a land valuation model.</a:t>
+            </a:r>
+          </a:p>
+          <a:p>
             <a:pPr marL="0" marR="0" lvl="0" indent="0" algn="l" defTabSz="1217613" rtl="0" eaLnBrk="0" fontAlgn="base" latinLnBrk="0" hangingPunct="0">
               <a:lnSpc>
                 <a:spcPct val="100000"/>
@@ -22436,7 +21952,7 @@
               <a:tabLst/>
               <a:defRPr/>
             </a:pPr>
-            <a:endParaRPr kumimoji="0" lang="en-US" sz="1000" b="0" i="0" u="none" strike="noStrike" kern="1200" cap="none" spc="0" normalizeH="0" baseline="0" noProof="0" dirty="0">
+            <a:endParaRPr kumimoji="0" lang="en-US" sz="600" b="0" i="0" u="none" strike="noStrike" kern="1200" cap="none" spc="0" normalizeH="0" baseline="0" noProof="0" dirty="0">
               <a:ln>
                 <a:noFill/>
               </a:ln>
@@ -22452,6 +21968,20 @@
             </a:endParaRPr>
           </a:p>
           <a:p>
+            <a:pPr algn="just" fontAlgn="base"/>
+            <a:r>
+              <a:rPr lang="en-US" sz="900" b="1" dirty="0">
+                <a:solidFill>
+                  <a:srgbClr val="6FC2B4"/>
+                </a:solidFill>
+                <a:latin typeface="Open Sans" panose="020B0606030504020204" pitchFamily="34" charset="0"/>
+                <a:ea typeface="Open Sans" panose="020B0606030504020204" pitchFamily="34" charset="0"/>
+                <a:cs typeface="Open Sans" panose="020B0606030504020204" pitchFamily="34" charset="0"/>
+              </a:rPr>
+              <a:t>Deloitte | Senior Consultant | Retail &amp; Commerce | 2023 – Present</a:t>
+            </a:r>
+          </a:p>
+          <a:p>
             <a:pPr marL="0" marR="0" lvl="0" indent="0" algn="l" defTabSz="1217613" rtl="0" eaLnBrk="0" fontAlgn="base" latinLnBrk="0" hangingPunct="0">
               <a:lnSpc>
                 <a:spcPct val="100000"/>
@@ -22471,7 +22001,7 @@
               <a:tabLst/>
               <a:defRPr/>
             </a:pPr>
-            <a:endParaRPr kumimoji="0" lang="en-US" sz="1000" b="0" i="0" u="none" strike="noStrike" kern="1200" cap="none" spc="0" normalizeH="0" baseline="0" noProof="0" dirty="0">
+            <a:endParaRPr kumimoji="0" lang="en-US" sz="600" b="0" i="0" u="none" strike="noStrike" kern="1200" cap="none" spc="0" normalizeH="0" baseline="0" noProof="0" dirty="0">
               <a:ln>
                 <a:noFill/>
               </a:ln>
@@ -22487,20 +22017,6 @@
             </a:endParaRPr>
           </a:p>
           <a:p>
-            <a:pPr algn="just" fontAlgn="base"/>
-            <a:r>
-              <a:rPr lang="en-US" sz="1000" b="1" dirty="0">
-                <a:solidFill>
-                  <a:srgbClr val="6FC2B4"/>
-                </a:solidFill>
-                <a:latin typeface="Open Sans" panose="020B0606030504020204" pitchFamily="34" charset="0"/>
-                <a:ea typeface="Open Sans" panose="020B0606030504020204" pitchFamily="34" charset="0"/>
-                <a:cs typeface="Open Sans" panose="020B0606030504020204" pitchFamily="34" charset="0"/>
-              </a:rPr>
-              <a:t>Deloitte | Senior Consultant | Hospitality &amp; Real Estate | 2023 – Present</a:t>
-            </a:r>
-          </a:p>
-          <a:p>
             <a:pPr marL="171450" indent="-171450" defTabSz="1217613" eaLnBrk="0" fontAlgn="base" hangingPunct="0">
               <a:spcBef>
                 <a:spcPts val="200"/>
@@ -22517,7 +22033,7 @@
               <a:defRPr/>
             </a:pPr>
             <a:r>
-              <a:rPr lang="en-US" sz="1000" dirty="0">
+              <a:rPr lang="en-US" sz="900" dirty="0" b="0">
                 <a:solidFill>
                   <a:srgbClr val="000000"/>
                 </a:solidFill>
@@ -22525,8 +22041,43 @@
                 <a:ea typeface="Open Sans" panose="020B0606030504020204" pitchFamily="34" charset="0"/>
                 <a:cs typeface="Open Sans" panose="020B0606030504020204" pitchFamily="34" charset="0"/>
               </a:rPr>
-              <a:t>Designed a 10-year growth plan for a hotel group valued at over USD $1B (additional present value of USD $100M+) and a land valuation model based on linear models.</a:t>
-            </a:r>
+              <a:t>Automated vehicle sales validation across 200+ dealerships (75% less time) and built a commerce AI agent with AWS, awarded at a partner hackathon.</a:t>
+            </a:r>
+          </a:p>
+          <a:p>
+            <a:pPr marL="0" marR="0" lvl="0" indent="0" algn="l" defTabSz="1217613" rtl="0" eaLnBrk="0" fontAlgn="base" latinLnBrk="0" hangingPunct="0">
+              <a:lnSpc>
+                <a:spcPct val="100000"/>
+              </a:lnSpc>
+              <a:spcBef>
+                <a:spcPts val="200"/>
+              </a:spcBef>
+              <a:spcAft>
+                <a:spcPct val="0"/>
+              </a:spcAft>
+              <a:buClr>
+                <a:srgbClr val="009A44"/>
+              </a:buClr>
+              <a:buSzPct val="140000"/>
+              <a:buFontTx/>
+              <a:buNone/>
+              <a:tabLst/>
+              <a:defRPr/>
+            </a:pPr>
+            <a:endParaRPr kumimoji="0" lang="en-US" sz="600" b="0" i="0" u="none" strike="noStrike" kern="1200" cap="none" spc="0" normalizeH="0" baseline="0" noProof="0" dirty="0">
+              <a:ln>
+                <a:noFill/>
+              </a:ln>
+              <a:solidFill>
+                <a:srgbClr val="000000"/>
+              </a:solidFill>
+              <a:effectLst/>
+              <a:uLnTx/>
+              <a:uFillTx/>
+              <a:latin typeface="Open Sans" panose="020B0606030504020204" pitchFamily="34" charset="0"/>
+              <a:ea typeface="Open Sans" panose="020B0606030504020204" pitchFamily="34" charset="0"/>
+              <a:cs typeface="Open Sans" panose="020B0606030504020204" pitchFamily="34" charset="0"/>
+            </a:endParaRPr>
           </a:p>
         </p:txBody>
       </p:sp>
